--- a/docs/chiikawa-collection-overview.pptx
+++ b/docs/chiikawa-collection-overview.pptx
@@ -15796,7 +15796,7 @@
                 <a:ea typeface="Hiragino Kaku Gothic ProN"/>
                 <a:cs typeface="Hiragino Kaku Gothic ProN"/>
               </a:rPr>
-              <a:t>固定値 "shoiwase"</a:t>
+              <a:t>固定値 "family"</a:t>
             </a:r>
           </a:p>
           <a:p>
